--- a/Course_Notes/EDA_in_Regression.pptx
+++ b/Course_Notes/EDA_in_Regression.pptx
@@ -12,6 +12,16 @@
     <p:sldId id="260" r:id="rId11"/>
     <p:sldId id="261" r:id="rId12"/>
     <p:sldId id="262" r:id="rId13"/>
+    <p:sldId id="263" r:id="rId14"/>
+    <p:sldId id="264" r:id="rId15"/>
+    <p:sldId id="265" r:id="rId16"/>
+    <p:sldId id="266" r:id="rId17"/>
+    <p:sldId id="267" r:id="rId18"/>
+    <p:sldId id="268" r:id="rId19"/>
+    <p:sldId id="269" r:id="rId20"/>
+    <p:sldId id="270" r:id="rId21"/>
+    <p:sldId id="271" r:id="rId22"/>
+    <p:sldId id="272" r:id="rId23"/>
   </p:sldIdLst>
   <p:sldSz cx="9144000" cy="6858000" type="screen4x3"/>
   <p:notesSz cx="6858000" cy="9144000"/>
@@ -3131,7 +3141,577 @@
           <a:lstStyle/>
           <a:p>
             <a:r>
-              <a:t>What EDA is, why it matters, and how it supports regression modeling</a:t>
+              <a:t>Purpose, tools, and role in regression modeling</a:t>
+            </a:r>
+          </a:p>
+        </p:txBody>
+      </p:sp>
+    </p:spTree>
+  </p:cSld>
+  <p:clrMapOvr>
+    <a:masterClrMapping/>
+  </p:clrMapOvr>
+</p:sld>
+</file>
+
+<file path=ppt/slides/slide10.xml><?xml version="1.0" encoding="utf-8"?>
+<p:sld xmlns:a="http://schemas.openxmlformats.org/drawingml/2006/main" xmlns:p="http://schemas.openxmlformats.org/presentationml/2006/main" xmlns:r="http://schemas.openxmlformats.org/officeDocument/2006/relationships">
+  <p:cSld>
+    <p:spTree>
+      <p:nvGrpSpPr>
+        <p:cNvPr id="1" name=""/>
+        <p:cNvGrpSpPr/>
+        <p:nvPr/>
+      </p:nvGrpSpPr>
+      <p:grpSpPr/>
+      <p:sp>
+        <p:nvSpPr>
+          <p:cNvPr id="2" name="Title 1"/>
+          <p:cNvSpPr>
+            <a:spLocks noGrp="1"/>
+          </p:cNvSpPr>
+          <p:nvPr>
+            <p:ph type="title"/>
+          </p:nvPr>
+        </p:nvSpPr>
+        <p:spPr/>
+        <p:txBody>
+          <a:bodyPr/>
+          <a:lstStyle/>
+          <a:p>
+            <a:r>
+              <a:t>Grouped Scatterplot Example</a:t>
+            </a:r>
+          </a:p>
+        </p:txBody>
+      </p:sp>
+      <p:pic>
+        <p:nvPicPr>
+          <p:cNvPr id="3" name="Picture 2" descr="eda_grouped.png"/>
+          <p:cNvPicPr>
+            <a:picLocks noChangeAspect="1"/>
+          </p:cNvPicPr>
+          <p:nvPr/>
+        </p:nvPicPr>
+        <p:blipFill>
+          <a:blip r:embed="rId2"/>
+          <a:stretch>
+            <a:fillRect/>
+          </a:stretch>
+        </p:blipFill>
+        <p:spPr>
+          <a:xfrm>
+            <a:off x="1188720" y="1371600"/>
+            <a:ext cx="5943600" cy="4811989"/>
+          </a:xfrm>
+          <a:prstGeom prst="rect">
+            <a:avLst/>
+          </a:prstGeom>
+        </p:spPr>
+      </p:pic>
+    </p:spTree>
+  </p:cSld>
+  <p:clrMapOvr>
+    <a:masterClrMapping/>
+  </p:clrMapOvr>
+</p:sld>
+</file>
+
+<file path=ppt/slides/slide11.xml><?xml version="1.0" encoding="utf-8"?>
+<p:sld xmlns:a="http://schemas.openxmlformats.org/drawingml/2006/main" xmlns:p="http://schemas.openxmlformats.org/presentationml/2006/main" xmlns:r="http://schemas.openxmlformats.org/officeDocument/2006/relationships">
+  <p:cSld>
+    <p:spTree>
+      <p:nvGrpSpPr>
+        <p:cNvPr id="1" name=""/>
+        <p:cNvGrpSpPr/>
+        <p:nvPr/>
+      </p:nvGrpSpPr>
+      <p:grpSpPr/>
+      <p:sp>
+        <p:nvSpPr>
+          <p:cNvPr id="2" name="Title 1"/>
+          <p:cNvSpPr>
+            <a:spLocks noGrp="1"/>
+          </p:cNvSpPr>
+          <p:nvPr>
+            <p:ph type="title"/>
+          </p:nvPr>
+        </p:nvSpPr>
+        <p:spPr/>
+        <p:txBody>
+          <a:bodyPr/>
+          <a:lstStyle/>
+          <a:p>
+            <a:r>
+              <a:t>EDA for Assumption Assessment (Pre-Model)</a:t>
+            </a:r>
+          </a:p>
+        </p:txBody>
+      </p:sp>
+      <p:sp>
+        <p:nvSpPr>
+          <p:cNvPr id="3" name="Content Placeholder 2"/>
+          <p:cNvSpPr>
+            <a:spLocks noGrp="1"/>
+          </p:cNvSpPr>
+          <p:nvPr>
+            <p:ph idx="1"/>
+          </p:nvPr>
+        </p:nvSpPr>
+        <p:spPr/>
+        <p:txBody>
+          <a:bodyPr/>
+          <a:lstStyle/>
+          <a:p>
+            <a:pPr/>
+            <a:r>
+              <a:t>Linearity: shape of Y vs X relationship</a:t>
+            </a:r>
+          </a:p>
+          <a:p>
+            <a:pPr/>
+            <a:r>
+              <a:t>Constant variance: visual spread across X</a:t>
+            </a:r>
+          </a:p>
+          <a:p>
+            <a:pPr/>
+            <a:r>
+              <a:t>Independence: temporal or spatial structure</a:t>
+            </a:r>
+          </a:p>
+        </p:txBody>
+      </p:sp>
+    </p:spTree>
+  </p:cSld>
+  <p:clrMapOvr>
+    <a:masterClrMapping/>
+  </p:clrMapOvr>
+</p:sld>
+</file>
+
+<file path=ppt/slides/slide12.xml><?xml version="1.0" encoding="utf-8"?>
+<p:sld xmlns:a="http://schemas.openxmlformats.org/drawingml/2006/main" xmlns:p="http://schemas.openxmlformats.org/presentationml/2006/main" xmlns:r="http://schemas.openxmlformats.org/officeDocument/2006/relationships">
+  <p:cSld>
+    <p:spTree>
+      <p:nvGrpSpPr>
+        <p:cNvPr id="1" name=""/>
+        <p:cNvGrpSpPr/>
+        <p:nvPr/>
+      </p:nvGrpSpPr>
+      <p:grpSpPr/>
+      <p:sp>
+        <p:nvSpPr>
+          <p:cNvPr id="2" name="Title 1"/>
+          <p:cNvSpPr>
+            <a:spLocks noGrp="1"/>
+          </p:cNvSpPr>
+          <p:nvPr>
+            <p:ph type="title"/>
+          </p:nvPr>
+        </p:nvSpPr>
+        <p:spPr/>
+        <p:txBody>
+          <a:bodyPr/>
+          <a:lstStyle/>
+          <a:p>
+            <a:r>
+              <a:t>Example of Non-Constant Variance</a:t>
+            </a:r>
+          </a:p>
+        </p:txBody>
+      </p:sp>
+      <p:pic>
+        <p:nvPicPr>
+          <p:cNvPr id="3" name="Picture 2" descr="eda_funnel.png"/>
+          <p:cNvPicPr>
+            <a:picLocks noChangeAspect="1"/>
+          </p:cNvPicPr>
+          <p:nvPr/>
+        </p:nvPicPr>
+        <p:blipFill>
+          <a:blip r:embed="rId2"/>
+          <a:stretch>
+            <a:fillRect/>
+          </a:stretch>
+        </p:blipFill>
+        <p:spPr>
+          <a:xfrm>
+            <a:off x="1188720" y="1371600"/>
+            <a:ext cx="5943600" cy="4881477"/>
+          </a:xfrm>
+          <a:prstGeom prst="rect">
+            <a:avLst/>
+          </a:prstGeom>
+        </p:spPr>
+      </p:pic>
+    </p:spTree>
+  </p:cSld>
+  <p:clrMapOvr>
+    <a:masterClrMapping/>
+  </p:clrMapOvr>
+</p:sld>
+</file>
+
+<file path=ppt/slides/slide13.xml><?xml version="1.0" encoding="utf-8"?>
+<p:sld xmlns:a="http://schemas.openxmlformats.org/drawingml/2006/main" xmlns:p="http://schemas.openxmlformats.org/presentationml/2006/main" xmlns:r="http://schemas.openxmlformats.org/officeDocument/2006/relationships">
+  <p:cSld>
+    <p:spTree>
+      <p:nvGrpSpPr>
+        <p:cNvPr id="1" name=""/>
+        <p:cNvGrpSpPr/>
+        <p:nvPr/>
+      </p:nvGrpSpPr>
+      <p:grpSpPr/>
+      <p:sp>
+        <p:nvSpPr>
+          <p:cNvPr id="2" name="Title 1"/>
+          <p:cNvSpPr>
+            <a:spLocks noGrp="1"/>
+          </p:cNvSpPr>
+          <p:nvPr>
+            <p:ph type="title"/>
+          </p:nvPr>
+        </p:nvSpPr>
+        <p:spPr/>
+        <p:txBody>
+          <a:bodyPr/>
+          <a:lstStyle/>
+          <a:p>
+            <a:r>
+              <a:t>EDA and Transformations</a:t>
+            </a:r>
+          </a:p>
+        </p:txBody>
+      </p:sp>
+      <p:sp>
+        <p:nvSpPr>
+          <p:cNvPr id="3" name="Content Placeholder 2"/>
+          <p:cNvSpPr>
+            <a:spLocks noGrp="1"/>
+          </p:cNvSpPr>
+          <p:nvPr>
+            <p:ph idx="1"/>
+          </p:nvPr>
+        </p:nvSpPr>
+        <p:spPr/>
+        <p:txBody>
+          <a:bodyPr/>
+          <a:lstStyle/>
+          <a:p>
+            <a:pPr/>
+            <a:r>
+              <a:t>Log or square-root transforms for skewness</a:t>
+            </a:r>
+          </a:p>
+          <a:p>
+            <a:pPr/>
+            <a:r>
+              <a:t>Centering or scaling predictors</a:t>
+            </a:r>
+          </a:p>
+          <a:p>
+            <a:pPr/>
+            <a:r>
+              <a:t>Choose transforms before formal inference</a:t>
+            </a:r>
+          </a:p>
+        </p:txBody>
+      </p:sp>
+    </p:spTree>
+  </p:cSld>
+  <p:clrMapOvr>
+    <a:masterClrMapping/>
+  </p:clrMapOvr>
+</p:sld>
+</file>
+
+<file path=ppt/slides/slide14.xml><?xml version="1.0" encoding="utf-8"?>
+<p:sld xmlns:a="http://schemas.openxmlformats.org/drawingml/2006/main" xmlns:p="http://schemas.openxmlformats.org/presentationml/2006/main" xmlns:r="http://schemas.openxmlformats.org/officeDocument/2006/relationships">
+  <p:cSld>
+    <p:spTree>
+      <p:nvGrpSpPr>
+        <p:cNvPr id="1" name=""/>
+        <p:cNvGrpSpPr/>
+        <p:nvPr/>
+      </p:nvGrpSpPr>
+      <p:grpSpPr/>
+      <p:sp>
+        <p:nvSpPr>
+          <p:cNvPr id="2" name="Title 1"/>
+          <p:cNvSpPr>
+            <a:spLocks noGrp="1"/>
+          </p:cNvSpPr>
+          <p:nvPr>
+            <p:ph type="title"/>
+          </p:nvPr>
+        </p:nvSpPr>
+        <p:spPr/>
+        <p:txBody>
+          <a:bodyPr/>
+          <a:lstStyle/>
+          <a:p>
+            <a:r>
+              <a:t>EDA vs Regression Diagnostics</a:t>
+            </a:r>
+          </a:p>
+        </p:txBody>
+      </p:sp>
+      <p:sp>
+        <p:nvSpPr>
+          <p:cNvPr id="3" name="Content Placeholder 2"/>
+          <p:cNvSpPr>
+            <a:spLocks noGrp="1"/>
+          </p:cNvSpPr>
+          <p:nvPr>
+            <p:ph idx="1"/>
+          </p:nvPr>
+        </p:nvSpPr>
+        <p:spPr/>
+        <p:txBody>
+          <a:bodyPr/>
+          <a:lstStyle/>
+          <a:p>
+            <a:pPr/>
+            <a:r>
+              <a:t>EDA uses raw data; diagnostics use residuals</a:t>
+            </a:r>
+          </a:p>
+          <a:p>
+            <a:pPr/>
+            <a:r>
+              <a:t>EDA is model-free; diagnostics are model-dependent</a:t>
+            </a:r>
+          </a:p>
+          <a:p>
+            <a:pPr/>
+            <a:r>
+              <a:t>Both are necessary but answer different questions</a:t>
+            </a:r>
+          </a:p>
+        </p:txBody>
+      </p:sp>
+    </p:spTree>
+  </p:cSld>
+  <p:clrMapOvr>
+    <a:masterClrMapping/>
+  </p:clrMapOvr>
+</p:sld>
+</file>
+
+<file path=ppt/slides/slide15.xml><?xml version="1.0" encoding="utf-8"?>
+<p:sld xmlns:a="http://schemas.openxmlformats.org/drawingml/2006/main" xmlns:p="http://schemas.openxmlformats.org/presentationml/2006/main" xmlns:r="http://schemas.openxmlformats.org/officeDocument/2006/relationships">
+  <p:cSld>
+    <p:spTree>
+      <p:nvGrpSpPr>
+        <p:cNvPr id="1" name=""/>
+        <p:cNvGrpSpPr/>
+        <p:nvPr/>
+      </p:nvGrpSpPr>
+      <p:grpSpPr/>
+      <p:sp>
+        <p:nvSpPr>
+          <p:cNvPr id="2" name="Title 1"/>
+          <p:cNvSpPr>
+            <a:spLocks noGrp="1"/>
+          </p:cNvSpPr>
+          <p:nvPr>
+            <p:ph type="title"/>
+          </p:nvPr>
+        </p:nvSpPr>
+        <p:spPr/>
+        <p:txBody>
+          <a:bodyPr/>
+          <a:lstStyle/>
+          <a:p>
+            <a:r>
+              <a:t>EDA in the Regression Workflow</a:t>
+            </a:r>
+          </a:p>
+        </p:txBody>
+      </p:sp>
+      <p:sp>
+        <p:nvSpPr>
+          <p:cNvPr id="3" name="Content Placeholder 2"/>
+          <p:cNvSpPr>
+            <a:spLocks noGrp="1"/>
+          </p:cNvSpPr>
+          <p:nvPr>
+            <p:ph idx="1"/>
+          </p:nvPr>
+        </p:nvSpPr>
+        <p:spPr/>
+        <p:txBody>
+          <a:bodyPr/>
+          <a:lstStyle/>
+          <a:p>
+            <a:pPr/>
+            <a:r>
+              <a:t>Data cleaning</a:t>
+            </a:r>
+          </a:p>
+          <a:p>
+            <a:pPr/>
+            <a:r>
+              <a:t>Exploratory Data Analysis</a:t>
+            </a:r>
+          </a:p>
+          <a:p>
+            <a:pPr/>
+            <a:r>
+              <a:t>Model specification and fitting</a:t>
+            </a:r>
+          </a:p>
+          <a:p>
+            <a:pPr/>
+            <a:r>
+              <a:t>Diagnostics and inference</a:t>
+            </a:r>
+          </a:p>
+        </p:txBody>
+      </p:sp>
+    </p:spTree>
+  </p:cSld>
+  <p:clrMapOvr>
+    <a:masterClrMapping/>
+  </p:clrMapOvr>
+</p:sld>
+</file>
+
+<file path=ppt/slides/slide16.xml><?xml version="1.0" encoding="utf-8"?>
+<p:sld xmlns:a="http://schemas.openxmlformats.org/drawingml/2006/main" xmlns:p="http://schemas.openxmlformats.org/presentationml/2006/main" xmlns:r="http://schemas.openxmlformats.org/officeDocument/2006/relationships">
+  <p:cSld>
+    <p:spTree>
+      <p:nvGrpSpPr>
+        <p:cNvPr id="1" name=""/>
+        <p:cNvGrpSpPr/>
+        <p:nvPr/>
+      </p:nvGrpSpPr>
+      <p:grpSpPr/>
+      <p:sp>
+        <p:nvSpPr>
+          <p:cNvPr id="2" name="Title 1"/>
+          <p:cNvSpPr>
+            <a:spLocks noGrp="1"/>
+          </p:cNvSpPr>
+          <p:nvPr>
+            <p:ph type="title"/>
+          </p:nvPr>
+        </p:nvSpPr>
+        <p:spPr/>
+        <p:txBody>
+          <a:bodyPr/>
+          <a:lstStyle/>
+          <a:p>
+            <a:r>
+              <a:t>Common Pitfalls in EDA</a:t>
+            </a:r>
+          </a:p>
+        </p:txBody>
+      </p:sp>
+      <p:sp>
+        <p:nvSpPr>
+          <p:cNvPr id="3" name="Content Placeholder 2"/>
+          <p:cNvSpPr>
+            <a:spLocks noGrp="1"/>
+          </p:cNvSpPr>
+          <p:nvPr>
+            <p:ph idx="1"/>
+          </p:nvPr>
+        </p:nvSpPr>
+        <p:spPr/>
+        <p:txBody>
+          <a:bodyPr/>
+          <a:lstStyle/>
+          <a:p>
+            <a:pPr/>
+            <a:r>
+              <a:t>Over-interpreting visual patterns</a:t>
+            </a:r>
+          </a:p>
+          <a:p>
+            <a:pPr/>
+            <a:r>
+              <a:t>Letting EDA drive inference</a:t>
+            </a:r>
+          </a:p>
+          <a:p>
+            <a:pPr/>
+            <a:r>
+              <a:t>Failing to document EDA-driven decisions</a:t>
+            </a:r>
+          </a:p>
+        </p:txBody>
+      </p:sp>
+    </p:spTree>
+  </p:cSld>
+  <p:clrMapOvr>
+    <a:masterClrMapping/>
+  </p:clrMapOvr>
+</p:sld>
+</file>
+
+<file path=ppt/slides/slide17.xml><?xml version="1.0" encoding="utf-8"?>
+<p:sld xmlns:a="http://schemas.openxmlformats.org/drawingml/2006/main" xmlns:p="http://schemas.openxmlformats.org/presentationml/2006/main" xmlns:r="http://schemas.openxmlformats.org/officeDocument/2006/relationships">
+  <p:cSld>
+    <p:spTree>
+      <p:nvGrpSpPr>
+        <p:cNvPr id="1" name=""/>
+        <p:cNvGrpSpPr/>
+        <p:nvPr/>
+      </p:nvGrpSpPr>
+      <p:grpSpPr/>
+      <p:sp>
+        <p:nvSpPr>
+          <p:cNvPr id="2" name="Title 1"/>
+          <p:cNvSpPr>
+            <a:spLocks noGrp="1"/>
+          </p:cNvSpPr>
+          <p:nvPr>
+            <p:ph type="title"/>
+          </p:nvPr>
+        </p:nvSpPr>
+        <p:spPr/>
+        <p:txBody>
+          <a:bodyPr/>
+          <a:lstStyle/>
+          <a:p>
+            <a:r>
+              <a:t>Summary</a:t>
+            </a:r>
+          </a:p>
+        </p:txBody>
+      </p:sp>
+      <p:sp>
+        <p:nvSpPr>
+          <p:cNvPr id="3" name="Content Placeholder 2"/>
+          <p:cNvSpPr>
+            <a:spLocks noGrp="1"/>
+          </p:cNvSpPr>
+          <p:nvPr>
+            <p:ph idx="1"/>
+          </p:nvPr>
+        </p:nvSpPr>
+        <p:spPr/>
+        <p:txBody>
+          <a:bodyPr/>
+          <a:lstStyle/>
+          <a:p>
+            <a:pPr/>
+            <a:r>
+              <a:t>EDA is essential for understanding data structure</a:t>
+            </a:r>
+          </a:p>
+          <a:p>
+            <a:pPr/>
+            <a:r>
+              <a:t>Helps anticipate assumption violations</a:t>
+            </a:r>
+          </a:p>
+          <a:p>
+            <a:pPr/>
+            <a:r>
+              <a:t>Improves regression when used as a guide, not a substitute for inference</a:t>
             </a:r>
           </a:p>
         </p:txBody>
@@ -3198,7 +3778,7 @@
           <a:p>
             <a:pPr/>
             <a:r>
-              <a:t>Detect outliers and data quality issues</a:t>
+              <a:t>Detect anomalies and data quality issues</a:t>
             </a:r>
           </a:p>
           <a:p>
@@ -3249,35 +3829,45 @@
           <a:lstStyle/>
           <a:p>
             <a:r>
-              <a:t>Scatterplots for Linearity Assessment</a:t>
-            </a:r>
-          </a:p>
-        </p:txBody>
-      </p:sp>
-      <p:pic>
-        <p:nvPicPr>
-          <p:cNvPr id="3" name="Picture 2" descr="scatter.png"/>
-          <p:cNvPicPr>
-            <a:picLocks noChangeAspect="1"/>
-          </p:cNvPicPr>
-          <p:nvPr/>
-        </p:nvPicPr>
-        <p:blipFill>
-          <a:blip r:embed="rId2"/>
-          <a:stretch>
-            <a:fillRect/>
-          </a:stretch>
-        </p:blipFill>
-        <p:spPr>
-          <a:xfrm>
-            <a:off x="1371600" y="1371600"/>
-            <a:ext cx="5486400" cy="4441836"/>
-          </a:xfrm>
-          <a:prstGeom prst="rect">
-            <a:avLst/>
-          </a:prstGeom>
-        </p:spPr>
-      </p:pic>
+              <a:t>EDA vs Regression Modeling</a:t>
+            </a:r>
+          </a:p>
+        </p:txBody>
+      </p:sp>
+      <p:sp>
+        <p:nvSpPr>
+          <p:cNvPr id="3" name="Content Placeholder 2"/>
+          <p:cNvSpPr>
+            <a:spLocks noGrp="1"/>
+          </p:cNvSpPr>
+          <p:nvPr>
+            <p:ph idx="1"/>
+          </p:nvPr>
+        </p:nvSpPr>
+        <p:spPr/>
+        <p:txBody>
+          <a:bodyPr/>
+          <a:lstStyle/>
+          <a:p>
+            <a:pPr/>
+            <a:r>
+              <a:t>EDA: descriptive, flexible, model-free</a:t>
+            </a:r>
+          </a:p>
+          <a:p>
+            <a:pPr/>
+            <a:r>
+              <a:t>Regression: inferential or predictive, formal</a:t>
+            </a:r>
+          </a:p>
+          <a:p>
+            <a:pPr/>
+            <a:r>
+              <a:t>EDA should precede model fitting and inference</a:t>
+            </a:r>
+          </a:p>
+        </p:txBody>
+      </p:sp>
     </p:spTree>
   </p:cSld>
   <p:clrMapOvr>
@@ -3312,35 +3902,45 @@
           <a:lstStyle/>
           <a:p>
             <a:r>
-              <a:t>Univariate EDA: Distribution of Response</a:t>
-            </a:r>
-          </a:p>
-        </p:txBody>
-      </p:sp>
-      <p:pic>
-        <p:nvPicPr>
-          <p:cNvPr id="3" name="Picture 2" descr="hist_y.png"/>
-          <p:cNvPicPr>
-            <a:picLocks noChangeAspect="1"/>
-          </p:cNvPicPr>
-          <p:nvPr/>
-        </p:nvPicPr>
-        <p:blipFill>
-          <a:blip r:embed="rId2"/>
-          <a:stretch>
-            <a:fillRect/>
-          </a:stretch>
-        </p:blipFill>
-        <p:spPr>
-          <a:xfrm>
-            <a:off x="1371600" y="1371600"/>
-            <a:ext cx="5486400" cy="4505978"/>
-          </a:xfrm>
-          <a:prstGeom prst="rect">
-            <a:avLst/>
-          </a:prstGeom>
-        </p:spPr>
-      </p:pic>
+              <a:t>Univariate EDA: Response Variable (Y)</a:t>
+            </a:r>
+          </a:p>
+        </p:txBody>
+      </p:sp>
+      <p:sp>
+        <p:nvSpPr>
+          <p:cNvPr id="3" name="Content Placeholder 2"/>
+          <p:cNvSpPr>
+            <a:spLocks noGrp="1"/>
+          </p:cNvSpPr>
+          <p:nvPr>
+            <p:ph idx="1"/>
+          </p:nvPr>
+        </p:nvSpPr>
+        <p:spPr/>
+        <p:txBody>
+          <a:bodyPr/>
+          <a:lstStyle/>
+          <a:p>
+            <a:pPr/>
+            <a:r>
+              <a:t>Examine distribution and scale of the response</a:t>
+            </a:r>
+          </a:p>
+          <a:p>
+            <a:pPr/>
+            <a:r>
+              <a:t>Identify outliers or extreme values</a:t>
+            </a:r>
+          </a:p>
+          <a:p>
+            <a:pPr/>
+            <a:r>
+              <a:t>Assess suitability for linear modeling</a:t>
+            </a:r>
+          </a:p>
+        </p:txBody>
+      </p:sp>
     </p:spTree>
   </p:cSld>
   <p:clrMapOvr>
@@ -3375,14 +3975,14 @@
           <a:lstStyle/>
           <a:p>
             <a:r>
-              <a:t>Detecting Non-Constant Variance</a:t>
+              <a:t>Histogram of Response Variable</a:t>
             </a:r>
           </a:p>
         </p:txBody>
       </p:sp>
       <p:pic>
         <p:nvPicPr>
-          <p:cNvPr id="3" name="Picture 2" descr="funnel.png"/>
+          <p:cNvPr id="3" name="Picture 2" descr="eda_hist.png"/>
           <p:cNvPicPr>
             <a:picLocks noChangeAspect="1"/>
           </p:cNvPicPr>
@@ -3396,8 +3996,8 @@
         </p:blipFill>
         <p:spPr>
           <a:xfrm>
-            <a:off x="1371600" y="1371600"/>
-            <a:ext cx="5486400" cy="4505978"/>
+            <a:off x="1188720" y="1371600"/>
+            <a:ext cx="5943600" cy="4811989"/>
           </a:xfrm>
           <a:prstGeom prst="rect">
             <a:avLst/>
@@ -3438,7 +4038,7 @@
           <a:lstStyle/>
           <a:p>
             <a:r>
-              <a:t>EDA vs Regression Diagnostics</a:t>
+              <a:t>Univariate EDA: Predictor Variables (X)</a:t>
             </a:r>
           </a:p>
         </p:txBody>
@@ -3460,19 +4060,19 @@
           <a:p>
             <a:pPr/>
             <a:r>
-              <a:t>EDA: model-free, uses raw data</a:t>
+              <a:t>Check ranges and plausibility of predictors</a:t>
             </a:r>
           </a:p>
           <a:p>
             <a:pPr/>
             <a:r>
-              <a:t>Diagnostics: model-based, use residuals</a:t>
+              <a:t>Identify skewness and leverage risks</a:t>
             </a:r>
           </a:p>
           <a:p>
             <a:pPr/>
             <a:r>
-              <a:t>Both are essential but answer different questions</a:t>
+              <a:t>Determine variable type (continuous vs categorical)</a:t>
             </a:r>
           </a:p>
         </p:txBody>
@@ -3511,7 +4111,7 @@
           <a:lstStyle/>
           <a:p>
             <a:r>
-              <a:t>Where EDA Fits in the Workflow</a:t>
+              <a:t>Bivariate EDA: Predictor–Response Relationships</a:t>
             </a:r>
           </a:p>
         </p:txBody>
@@ -3533,19 +4133,149 @@
           <a:p>
             <a:pPr/>
             <a:r>
-              <a:t>EDA should occur before model fitting</a:t>
+              <a:t>Scatterplots assess linearity and association</a:t>
             </a:r>
           </a:p>
           <a:p>
             <a:pPr/>
             <a:r>
-              <a:t>Revisited after multiple regression for multivariate structure</a:t>
+              <a:t>Reveal curvature, heteroskedasticity, and clusters</a:t>
             </a:r>
           </a:p>
           <a:p>
             <a:pPr/>
             <a:r>
-              <a:t>Guides, but does not replace, formal inference</a:t>
+              <a:t>Most important EDA tool for regression</a:t>
+            </a:r>
+          </a:p>
+        </p:txBody>
+      </p:sp>
+    </p:spTree>
+  </p:cSld>
+  <p:clrMapOvr>
+    <a:masterClrMapping/>
+  </p:clrMapOvr>
+</p:sld>
+</file>
+
+<file path=ppt/slides/slide8.xml><?xml version="1.0" encoding="utf-8"?>
+<p:sld xmlns:a="http://schemas.openxmlformats.org/drawingml/2006/main" xmlns:p="http://schemas.openxmlformats.org/presentationml/2006/main" xmlns:r="http://schemas.openxmlformats.org/officeDocument/2006/relationships">
+  <p:cSld>
+    <p:spTree>
+      <p:nvGrpSpPr>
+        <p:cNvPr id="1" name=""/>
+        <p:cNvGrpSpPr/>
+        <p:nvPr/>
+      </p:nvGrpSpPr>
+      <p:grpSpPr/>
+      <p:sp>
+        <p:nvSpPr>
+          <p:cNvPr id="2" name="Title 1"/>
+          <p:cNvSpPr>
+            <a:spLocks noGrp="1"/>
+          </p:cNvSpPr>
+          <p:nvPr>
+            <p:ph type="title"/>
+          </p:nvPr>
+        </p:nvSpPr>
+        <p:spPr/>
+        <p:txBody>
+          <a:bodyPr/>
+          <a:lstStyle/>
+          <a:p>
+            <a:r>
+              <a:t>Scatterplot for Linearity Assessment</a:t>
+            </a:r>
+          </a:p>
+        </p:txBody>
+      </p:sp>
+      <p:pic>
+        <p:nvPicPr>
+          <p:cNvPr id="3" name="Picture 2" descr="eda_scatter.png"/>
+          <p:cNvPicPr>
+            <a:picLocks noChangeAspect="1"/>
+          </p:cNvPicPr>
+          <p:nvPr/>
+        </p:nvPicPr>
+        <p:blipFill>
+          <a:blip r:embed="rId2"/>
+          <a:stretch>
+            <a:fillRect/>
+          </a:stretch>
+        </p:blipFill>
+        <p:spPr>
+          <a:xfrm>
+            <a:off x="1188720" y="1371600"/>
+            <a:ext cx="5943600" cy="4811989"/>
+          </a:xfrm>
+          <a:prstGeom prst="rect">
+            <a:avLst/>
+          </a:prstGeom>
+        </p:spPr>
+      </p:pic>
+    </p:spTree>
+  </p:cSld>
+  <p:clrMapOvr>
+    <a:masterClrMapping/>
+  </p:clrMapOvr>
+</p:sld>
+</file>
+
+<file path=ppt/slides/slide9.xml><?xml version="1.0" encoding="utf-8"?>
+<p:sld xmlns:a="http://schemas.openxmlformats.org/drawingml/2006/main" xmlns:p="http://schemas.openxmlformats.org/presentationml/2006/main" xmlns:r="http://schemas.openxmlformats.org/officeDocument/2006/relationships">
+  <p:cSld>
+    <p:spTree>
+      <p:nvGrpSpPr>
+        <p:cNvPr id="1" name=""/>
+        <p:cNvGrpSpPr/>
+        <p:nvPr/>
+      </p:nvGrpSpPr>
+      <p:grpSpPr/>
+      <p:sp>
+        <p:nvSpPr>
+          <p:cNvPr id="2" name="Title 1"/>
+          <p:cNvSpPr>
+            <a:spLocks noGrp="1"/>
+          </p:cNvSpPr>
+          <p:nvPr>
+            <p:ph type="title"/>
+          </p:nvPr>
+        </p:nvSpPr>
+        <p:spPr/>
+        <p:txBody>
+          <a:bodyPr/>
+          <a:lstStyle/>
+          <a:p>
+            <a:r>
+              <a:t>Grouped and Conditional Plots</a:t>
+            </a:r>
+          </a:p>
+        </p:txBody>
+      </p:sp>
+      <p:sp>
+        <p:nvSpPr>
+          <p:cNvPr id="3" name="Content Placeholder 2"/>
+          <p:cNvSpPr>
+            <a:spLocks noGrp="1"/>
+          </p:cNvSpPr>
+          <p:nvPr>
+            <p:ph idx="1"/>
+          </p:nvPr>
+        </p:nvSpPr>
+        <p:spPr/>
+        <p:txBody>
+          <a:bodyPr/>
+          <a:lstStyle/>
+          <a:p>
+            <a:pPr/>
+            <a:r>
+              <a:t>Reveal interactions or effect modification</a:t>
+            </a:r>
+          </a:p>
+          <a:p>
+            <a:pPr/>
+            <a:r>
+              <a:t>Assess whether a single regression line is appropriate</a:t>
             </a:r>
           </a:p>
         </p:txBody>
